--- a/quran-deck/Quran-Reading-Letters.pptx
+++ b/quran-deck/Quran-Reading-Letters.pptx
@@ -4,6 +4,9 @@
   <p:sldMasterIdLst>
     <p:sldMasterId id="2147483648" r:id="rId1"/>
   </p:sldMasterIdLst>
+  <p:notesMasterIdLst>
+    <p:notesMasterId r:id="rId39"/>
+  </p:notesMasterIdLst>
   <p:sldIdLst>
     <p:sldId id="256" r:id="rId2"/>
     <p:sldId id="257" r:id="rId3"/>
@@ -43,9 +46,6 @@
     <p:sldId id="291" r:id="rId37"/>
     <p:sldId id="292" r:id="rId38"/>
   </p:sldIdLst>
-  <p:notesMasterIdLst>
-    <p:notesMasterId r:id="rId39"/>
-  </p:notesMasterIdLst>
   <p:sldSz cx="9144000" cy="5143500"/>
   <p:notesSz cx="5143500" cy="9144000"/>
   <p:defaultTextStyle>
@@ -4555,9 +4555,6 @@
               </a:rPr>
               <a:t>Sounds like: </a:t>
             </a:r>
-            <a:pPr indent="0" marL="0">
-              <a:buNone/>
-            </a:pPr>
             <a:r>
               <a:rPr lang="en-US" sz="2200" b="1" dirty="0">
                 <a:solidFill>
@@ -4888,9 +4885,6 @@
               </a:rPr>
               <a:t>Sounds like: </a:t>
             </a:r>
-            <a:pPr indent="0" marL="0">
-              <a:buNone/>
-            </a:pPr>
             <a:r>
               <a:rPr lang="en-US" sz="2200" b="1" dirty="0">
                 <a:solidFill>
@@ -5221,9 +5215,6 @@
               </a:rPr>
               <a:t>Sounds like: </a:t>
             </a:r>
-            <a:pPr indent="0" marL="0">
-              <a:buNone/>
-            </a:pPr>
             <a:r>
               <a:rPr lang="en-US" sz="2200" b="1" dirty="0">
                 <a:solidFill>
@@ -5554,9 +5545,6 @@
               </a:rPr>
               <a:t>Sounds like: </a:t>
             </a:r>
-            <a:pPr indent="0" marL="0">
-              <a:buNone/>
-            </a:pPr>
             <a:r>
               <a:rPr lang="en-US" sz="2200" b="1" dirty="0">
                 <a:solidFill>
@@ -5887,9 +5875,6 @@
               </a:rPr>
               <a:t>Sounds like: </a:t>
             </a:r>
-            <a:pPr indent="0" marL="0">
-              <a:buNone/>
-            </a:pPr>
             <a:r>
               <a:rPr lang="en-US" sz="2200" b="1" dirty="0">
                 <a:solidFill>
@@ -6220,9 +6205,6 @@
               </a:rPr>
               <a:t>Sounds like: </a:t>
             </a:r>
-            <a:pPr indent="0" marL="0">
-              <a:buNone/>
-            </a:pPr>
             <a:r>
               <a:rPr lang="en-US" sz="2200" b="1" dirty="0">
                 <a:solidFill>
@@ -6553,9 +6535,6 @@
               </a:rPr>
               <a:t>Sounds like: </a:t>
             </a:r>
-            <a:pPr indent="0" marL="0">
-              <a:buNone/>
-            </a:pPr>
             <a:r>
               <a:rPr lang="en-US" sz="2200" b="1" dirty="0">
                 <a:solidFill>
@@ -6886,9 +6865,6 @@
               </a:rPr>
               <a:t>Sounds like: </a:t>
             </a:r>
-            <a:pPr indent="0" marL="0">
-              <a:buNone/>
-            </a:pPr>
             <a:r>
               <a:rPr lang="en-US" sz="2200" b="1" dirty="0">
                 <a:solidFill>
@@ -7219,9 +7195,6 @@
               </a:rPr>
               <a:t>Sounds like: </a:t>
             </a:r>
-            <a:pPr indent="0" marL="0">
-              <a:buNone/>
-            </a:pPr>
             <a:r>
               <a:rPr lang="en-US" sz="2200" b="1" dirty="0">
                 <a:solidFill>
@@ -7552,9 +7525,6 @@
               </a:rPr>
               <a:t>Sounds like: </a:t>
             </a:r>
-            <a:pPr indent="0" marL="0">
-              <a:buNone/>
-            </a:pPr>
             <a:r>
               <a:rPr lang="en-US" sz="2200" b="1" dirty="0">
                 <a:solidFill>
@@ -8670,9 +8640,6 @@
               </a:rPr>
               <a:t>Sounds like: </a:t>
             </a:r>
-            <a:pPr indent="0" marL="0">
-              <a:buNone/>
-            </a:pPr>
             <a:r>
               <a:rPr lang="en-US" sz="2200" b="1" dirty="0">
                 <a:solidFill>
@@ -9003,9 +8970,6 @@
               </a:rPr>
               <a:t>Sounds like: </a:t>
             </a:r>
-            <a:pPr indent="0" marL="0">
-              <a:buNone/>
-            </a:pPr>
             <a:r>
               <a:rPr lang="en-US" sz="2200" b="1" dirty="0">
                 <a:solidFill>
@@ -9336,9 +9300,6 @@
               </a:rPr>
               <a:t>Sounds like: </a:t>
             </a:r>
-            <a:pPr indent="0" marL="0">
-              <a:buNone/>
-            </a:pPr>
             <a:r>
               <a:rPr lang="en-US" sz="2200" b="1" dirty="0">
                 <a:solidFill>
@@ -9669,9 +9630,6 @@
               </a:rPr>
               <a:t>Sounds like: </a:t>
             </a:r>
-            <a:pPr indent="0" marL="0">
-              <a:buNone/>
-            </a:pPr>
             <a:r>
               <a:rPr lang="en-US" sz="2200" b="1" dirty="0">
                 <a:solidFill>
@@ -10002,9 +9960,6 @@
               </a:rPr>
               <a:t>Sounds like: </a:t>
             </a:r>
-            <a:pPr indent="0" marL="0">
-              <a:buNone/>
-            </a:pPr>
             <a:r>
               <a:rPr lang="en-US" sz="2200" b="1" dirty="0">
                 <a:solidFill>
@@ -10335,9 +10290,6 @@
               </a:rPr>
               <a:t>Sounds like: </a:t>
             </a:r>
-            <a:pPr indent="0" marL="0">
-              <a:buNone/>
-            </a:pPr>
             <a:r>
               <a:rPr lang="en-US" sz="2200" b="1" dirty="0">
                 <a:solidFill>
@@ -10668,9 +10620,6 @@
               </a:rPr>
               <a:t>Sounds like: </a:t>
             </a:r>
-            <a:pPr indent="0" marL="0">
-              <a:buNone/>
-            </a:pPr>
             <a:r>
               <a:rPr lang="en-US" sz="2200" b="1" dirty="0">
                 <a:solidFill>
@@ -11001,9 +10950,6 @@
               </a:rPr>
               <a:t>Sounds like: </a:t>
             </a:r>
-            <a:pPr indent="0" marL="0">
-              <a:buNone/>
-            </a:pPr>
             <a:r>
               <a:rPr lang="en-US" sz="2200" b="1" dirty="0">
                 <a:solidFill>
@@ -11334,9 +11280,6 @@
               </a:rPr>
               <a:t>Sounds like: </a:t>
             </a:r>
-            <a:pPr indent="0" marL="0">
-              <a:buNone/>
-            </a:pPr>
             <a:r>
               <a:rPr lang="en-US" sz="2200" b="1" dirty="0">
                 <a:solidFill>
@@ -11667,9 +11610,6 @@
               </a:rPr>
               <a:t>Sounds like: </a:t>
             </a:r>
-            <a:pPr indent="0" marL="0">
-              <a:buNone/>
-            </a:pPr>
             <a:r>
               <a:rPr lang="en-US" sz="2200" b="1" dirty="0">
                 <a:solidFill>
@@ -13829,9 +13769,6 @@
               </a:rPr>
               <a:t>Sounds like: </a:t>
             </a:r>
-            <a:pPr indent="0" marL="0">
-              <a:buNone/>
-            </a:pPr>
             <a:r>
               <a:rPr lang="en-US" sz="2200" b="1" dirty="0">
                 <a:solidFill>
@@ -14162,9 +14099,6 @@
               </a:rPr>
               <a:t>Sounds like: </a:t>
             </a:r>
-            <a:pPr indent="0" marL="0">
-              <a:buNone/>
-            </a:pPr>
             <a:r>
               <a:rPr lang="en-US" sz="2200" b="1" dirty="0">
                 <a:solidFill>
@@ -16336,9 +16270,6 @@
               </a:rPr>
               <a:t>Sounds like: </a:t>
             </a:r>
-            <a:pPr indent="0" marL="0">
-              <a:buNone/>
-            </a:pPr>
             <a:r>
               <a:rPr lang="en-US" sz="2200" b="1" dirty="0">
                 <a:solidFill>
@@ -16669,9 +16600,6 @@
               </a:rPr>
               <a:t>Sounds like: </a:t>
             </a:r>
-            <a:pPr indent="0" marL="0">
-              <a:buNone/>
-            </a:pPr>
             <a:r>
               <a:rPr lang="en-US" sz="2200" b="1" dirty="0">
                 <a:solidFill>
@@ -17002,9 +16930,6 @@
               </a:rPr>
               <a:t>Sounds like: </a:t>
             </a:r>
-            <a:pPr indent="0" marL="0">
-              <a:buNone/>
-            </a:pPr>
             <a:r>
               <a:rPr lang="en-US" sz="2200" b="1" dirty="0">
                 <a:solidFill>
@@ -17335,9 +17260,6 @@
               </a:rPr>
               <a:t>Sounds like: </a:t>
             </a:r>
-            <a:pPr indent="0" marL="0">
-              <a:buNone/>
-            </a:pPr>
             <a:r>
               <a:rPr lang="en-US" sz="2200" b="1" dirty="0">
                 <a:solidFill>
@@ -17668,9 +17590,6 @@
               </a:rPr>
               <a:t>Sounds like: </a:t>
             </a:r>
-            <a:pPr indent="0" marL="0">
-              <a:buNone/>
-            </a:pPr>
             <a:r>
               <a:rPr lang="en-US" sz="2200" b="1" dirty="0">
                 <a:solidFill>
@@ -18001,9 +17920,6 @@
               </a:rPr>
               <a:t>Sounds like: </a:t>
             </a:r>
-            <a:pPr indent="0" marL="0">
-              <a:buNone/>
-            </a:pPr>
             <a:r>
               <a:rPr lang="en-US" sz="2200" b="1" dirty="0">
                 <a:solidFill>
